--- a/docs/pptx/Ch9_SUPPLEMENT.pptx
+++ b/docs/pptx/Ch9_SUPPLEMENT.pptx
@@ -504,10 +504,18 @@
           <a:lstStyle/>
           <a:p>
             <a:r>
-              <a:rPr lang="en-US" dirty="0"/>
-              <a:t/>
-            </a:r>
-            <a:endParaRPr lang="en-US" dirty="0"/>
+              <a:t>PROF: Exercice BST — insérer 7, 3, 11, 1, 5, 9, 13 et dessiner l'arbre.</a:t>
+            </a:r>
+          </a:p>
+          <a:p>
+            <a:r>
+              <a:t>Puis faire les 3 parcours à la main.</a:t>
+            </a:r>
+          </a:p>
+          <a:p>
+            <a:r>
+              <a:t>Durée : 15 min dessin + 10 min parcours.</a:t>
+            </a:r>
           </a:p>
         </p:txBody>
       </p:sp>
@@ -592,10 +600,18 @@
           <a:lstStyle/>
           <a:p>
             <a:r>
-              <a:rPr lang="en-US" dirty="0"/>
-              <a:t/>
-            </a:r>
-            <a:endParaRPr lang="en-US" dirty="0"/>
+              <a:t>PROF: Questions sur l'Insertion Sort.</a:t>
+            </a:r>
+          </a:p>
+          <a:p>
+            <a:r>
+              <a:t>'Pourquoi Insertion Sort est bon pour les petits tableaux ?'</a:t>
+            </a:r>
+          </a:p>
+          <a:p>
+            <a:r>
+              <a:t>'Pourquoi Java l'utilise dans TimSort pour les sous-tableaux &lt; 32 ?'</a:t>
+            </a:r>
           </a:p>
         </p:txBody>
       </p:sp>
@@ -680,10 +696,13 @@
           <a:lstStyle/>
           <a:p>
             <a:r>
-              <a:rPr lang="en-US" dirty="0"/>
-              <a:t/>
-            </a:r>
-            <a:endParaRPr lang="en-US" dirty="0"/>
+              <a:t>PROF: Récap — tableau comparatif des 4 tris à compléter.</a:t>
+            </a:r>
+          </a:p>
+          <a:p>
+            <a:r>
+              <a:t>Bubble, Insertion, Quick, Merge : temps moyen, pire cas, espace, stable.</a:t>
+            </a:r>
           </a:p>
         </p:txBody>
       </p:sp>
@@ -768,10 +787,13 @@
           <a:lstStyle/>
           <a:p>
             <a:r>
-              <a:rPr lang="en-US" dirty="0"/>
-              <a:t/>
-            </a:r>
-            <a:endParaRPr lang="en-US" dirty="0"/>
+              <a:t>PROF: Code BST search à tracer au tableau.</a:t>
+            </a:r>
+          </a:p>
+          <a:p>
+            <a:r>
+              <a:t>Montrer que chaque comparaison élimine la moitié de l'arbre → O(log n).</a:t>
+            </a:r>
           </a:p>
         </p:txBody>
       </p:sp>
